--- a/Programacion II/Clases/Clase 5 - Parcial 1/Presentacion.pptx
+++ b/Programacion II/Clases/Clase 5 - Parcial 1/Presentacion.pptx
@@ -3665,7 +3665,7 @@
                 </a:solidFill>
                 <a:latin typeface="Calibri"/>
               </a:rPr>
-              <a:t> (presencial sincrono).</a:t>
+              <a:t> (virtual sincrono por Meet).</a:t>
             </a:r>
           </a:p>
           <a:p>

--- a/Programacion II/Clases/Clase 5 - Parcial 1/Presentacion.pptx
+++ b/Programacion II/Clases/Clase 5 - Parcial 1/Presentacion.pptx
@@ -3641,7 +3641,7 @@
               </a:spcAft>
             </a:pPr>
             <a:r>
-              <a:rPr sz="1600" b="0" i="0">
+              <a:rPr sz="2000" b="0" i="0">
                 <a:solidFill>
                   <a:srgbClr val="333333"/>
                 </a:solidFill>
@@ -3650,7 +3650,7 @@
               <a:t>–   Hoy es </a:t>
             </a:r>
             <a:r>
-              <a:rPr sz="1600" b="1" i="0">
+              <a:rPr sz="2000" b="1" i="0">
                 <a:solidFill>
                   <a:srgbClr val="333333"/>
                 </a:solidFill>
@@ -3659,7 +3659,7 @@
               <a:t>solo Parcial</a:t>
             </a:r>
             <a:r>
-              <a:rPr sz="1600" b="0" i="0">
+              <a:rPr sz="2000" b="0" i="0">
                 <a:solidFill>
                   <a:srgbClr val="333333"/>
                 </a:solidFill>
@@ -3675,7 +3675,7 @@
               </a:spcAft>
             </a:pPr>
             <a:r>
-              <a:rPr sz="1600" b="0" i="0">
+              <a:rPr sz="2000" b="0" i="0">
                 <a:solidFill>
                   <a:srgbClr val="333333"/>
                 </a:solidFill>
@@ -3691,7 +3691,7 @@
               </a:spcAft>
             </a:pPr>
             <a:r>
-              <a:rPr sz="1600" b="0" i="0">
+              <a:rPr sz="2000" b="0" i="0">
                 <a:solidFill>
                   <a:srgbClr val="333333"/>
                 </a:solidFill>
@@ -3700,7 +3700,7 @@
               <a:t>–   Duracion sugerida: </a:t>
             </a:r>
             <a:r>
-              <a:rPr sz="1600" b="1" i="0">
+              <a:rPr sz="2000" b="1" i="0">
                 <a:solidFill>
                   <a:srgbClr val="333333"/>
                 </a:solidFill>
@@ -3709,7 +3709,7 @@
               <a:t>90–100 min</a:t>
             </a:r>
             <a:r>
-              <a:rPr sz="1600" b="0" i="0">
+              <a:rPr sz="2000" b="0" i="0">
                 <a:solidFill>
                   <a:srgbClr val="333333"/>
                 </a:solidFill>
@@ -3725,7 +3725,7 @@
               </a:spcAft>
             </a:pPr>
             <a:r>
-              <a:rPr sz="1600" b="0" i="0">
+              <a:rPr sz="2000" b="0" i="0">
                 <a:solidFill>
                   <a:srgbClr val="333333"/>
                 </a:solidFill>
